--- a/ゲーム科1年/00_前期/ゲームプログラミングⅢ/00_ジャンプ.pptx
+++ b/ゲーム科1年/00_前期/ゲームプログラミングⅢ/00_ジャンプ.pptx
@@ -270,7 +270,7 @@
           <a:p>
             <a:fld id="{E9CC885B-4903-4D54-9A93-00025F12DED9}" type="datetimeFigureOut">
               <a:rPr kumimoji="1" lang="ja-JP" altLang="en-US" smtClean="0"/>
-              <a:t>2024/10/24</a:t>
+              <a:t>2025/3/3</a:t>
             </a:fld>
             <a:endParaRPr kumimoji="1" lang="ja-JP" altLang="en-US"/>
           </a:p>
@@ -500,7 +500,7 @@
           <a:p>
             <a:fld id="{E9CC885B-4903-4D54-9A93-00025F12DED9}" type="datetimeFigureOut">
               <a:rPr kumimoji="1" lang="ja-JP" altLang="en-US" smtClean="0"/>
-              <a:t>2024/10/24</a:t>
+              <a:t>2025/3/3</a:t>
             </a:fld>
             <a:endParaRPr kumimoji="1" lang="ja-JP" altLang="en-US"/>
           </a:p>
@@ -740,7 +740,7 @@
           <a:p>
             <a:fld id="{E9CC885B-4903-4D54-9A93-00025F12DED9}" type="datetimeFigureOut">
               <a:rPr kumimoji="1" lang="ja-JP" altLang="en-US" smtClean="0"/>
-              <a:t>2024/10/24</a:t>
+              <a:t>2025/3/3</a:t>
             </a:fld>
             <a:endParaRPr kumimoji="1" lang="ja-JP" altLang="en-US"/>
           </a:p>
@@ -970,7 +970,7 @@
           <a:p>
             <a:fld id="{E9CC885B-4903-4D54-9A93-00025F12DED9}" type="datetimeFigureOut">
               <a:rPr kumimoji="1" lang="ja-JP" altLang="en-US" smtClean="0"/>
-              <a:t>2024/10/24</a:t>
+              <a:t>2025/3/3</a:t>
             </a:fld>
             <a:endParaRPr kumimoji="1" lang="ja-JP" altLang="en-US"/>
           </a:p>
@@ -1245,7 +1245,7 @@
           <a:p>
             <a:fld id="{E9CC885B-4903-4D54-9A93-00025F12DED9}" type="datetimeFigureOut">
               <a:rPr kumimoji="1" lang="ja-JP" altLang="en-US" smtClean="0"/>
-              <a:t>2024/10/24</a:t>
+              <a:t>2025/3/3</a:t>
             </a:fld>
             <a:endParaRPr kumimoji="1" lang="ja-JP" altLang="en-US"/>
           </a:p>
@@ -1574,7 +1574,7 @@
           <a:p>
             <a:fld id="{E9CC885B-4903-4D54-9A93-00025F12DED9}" type="datetimeFigureOut">
               <a:rPr kumimoji="1" lang="ja-JP" altLang="en-US" smtClean="0"/>
-              <a:t>2024/10/24</a:t>
+              <a:t>2025/3/3</a:t>
             </a:fld>
             <a:endParaRPr kumimoji="1" lang="ja-JP" altLang="en-US"/>
           </a:p>
@@ -2050,7 +2050,7 @@
           <a:p>
             <a:fld id="{E9CC885B-4903-4D54-9A93-00025F12DED9}" type="datetimeFigureOut">
               <a:rPr kumimoji="1" lang="ja-JP" altLang="en-US" smtClean="0"/>
-              <a:t>2024/10/24</a:t>
+              <a:t>2025/3/3</a:t>
             </a:fld>
             <a:endParaRPr kumimoji="1" lang="ja-JP" altLang="en-US"/>
           </a:p>
@@ -2191,7 +2191,7 @@
           <a:p>
             <a:fld id="{E9CC885B-4903-4D54-9A93-00025F12DED9}" type="datetimeFigureOut">
               <a:rPr kumimoji="1" lang="ja-JP" altLang="en-US" smtClean="0"/>
-              <a:t>2024/10/24</a:t>
+              <a:t>2025/3/3</a:t>
             </a:fld>
             <a:endParaRPr kumimoji="1" lang="ja-JP" altLang="en-US"/>
           </a:p>
@@ -2304,7 +2304,7 @@
           <a:p>
             <a:fld id="{E9CC885B-4903-4D54-9A93-00025F12DED9}" type="datetimeFigureOut">
               <a:rPr kumimoji="1" lang="ja-JP" altLang="en-US" smtClean="0"/>
-              <a:t>2024/10/24</a:t>
+              <a:t>2025/3/3</a:t>
             </a:fld>
             <a:endParaRPr kumimoji="1" lang="ja-JP" altLang="en-US"/>
           </a:p>
@@ -2647,7 +2647,7 @@
           <a:p>
             <a:fld id="{E9CC885B-4903-4D54-9A93-00025F12DED9}" type="datetimeFigureOut">
               <a:rPr kumimoji="1" lang="ja-JP" altLang="en-US" smtClean="0"/>
-              <a:t>2024/10/24</a:t>
+              <a:t>2025/3/3</a:t>
             </a:fld>
             <a:endParaRPr kumimoji="1" lang="ja-JP" altLang="en-US"/>
           </a:p>
@@ -2935,7 +2935,7 @@
           <a:p>
             <a:fld id="{E9CC885B-4903-4D54-9A93-00025F12DED9}" type="datetimeFigureOut">
               <a:rPr kumimoji="1" lang="ja-JP" altLang="en-US" smtClean="0"/>
-              <a:t>2024/10/24</a:t>
+              <a:t>2025/3/3</a:t>
             </a:fld>
             <a:endParaRPr kumimoji="1" lang="ja-JP" altLang="en-US"/>
           </a:p>
@@ -3208,7 +3208,7 @@
           <a:p>
             <a:fld id="{E9CC885B-4903-4D54-9A93-00025F12DED9}" type="datetimeFigureOut">
               <a:rPr kumimoji="1" lang="ja-JP" altLang="en-US" smtClean="0"/>
-              <a:t>2024/10/24</a:t>
+              <a:t>2025/3/3</a:t>
             </a:fld>
             <a:endParaRPr kumimoji="1" lang="ja-JP" altLang="en-US"/>
           </a:p>
@@ -4898,7 +4898,19 @@
           <a:p>
             <a:r>
               <a:rPr lang="ja-JP" altLang="en-US" sz="2400" dirty="0"/>
-              <a:t>次のフレームから重力の分だけ弱くなった力で上昇します。</a:t>
+              <a:t>次のフレームから</a:t>
+            </a:r>
+            <a:r>
+              <a:rPr lang="ja-JP" altLang="en-US" sz="2400" b="1" dirty="0">
+                <a:solidFill>
+                  <a:srgbClr val="FF0000"/>
+                </a:solidFill>
+              </a:rPr>
+              <a:t>重力の分だけ弱くなった力で上昇</a:t>
+            </a:r>
+            <a:r>
+              <a:rPr lang="ja-JP" altLang="en-US" sz="2400" dirty="0"/>
+              <a:t>します。</a:t>
             </a:r>
             <a:endParaRPr kumimoji="1" lang="en-US" altLang="ja-JP" sz="2400" dirty="0"/>
           </a:p>
@@ -8360,7 +8372,7 @@
         <p:spPr>
           <a:xfrm>
             <a:off x="567542" y="1216429"/>
-            <a:ext cx="7210628" cy="461665"/>
+            <a:ext cx="7305205" cy="461665"/>
           </a:xfrm>
           <a:prstGeom prst="rect">
             <a:avLst/>
@@ -8374,7 +8386,11 @@
           <a:lstStyle/>
           <a:p>
             <a:r>
-              <a:rPr lang="en-US" altLang="ja-JP" sz="2400" dirty="0"/>
+              <a:rPr lang="en-US" altLang="ja-JP" sz="2400" b="1" dirty="0">
+                <a:solidFill>
+                  <a:srgbClr val="FF0000"/>
+                </a:solidFill>
+              </a:rPr>
               <a:t>Player.cpp</a:t>
             </a:r>
             <a:r>

--- a/ゲーム科1年/00_前期/ゲームプログラミングⅢ/00_ジャンプ.pptx
+++ b/ゲーム科1年/00_前期/ゲームプログラミングⅢ/00_ジャンプ.pptx
@@ -270,7 +270,7 @@
           <a:p>
             <a:fld id="{E9CC885B-4903-4D54-9A93-00025F12DED9}" type="datetimeFigureOut">
               <a:rPr kumimoji="1" lang="ja-JP" altLang="en-US" smtClean="0"/>
-              <a:t>2025/3/3</a:t>
+              <a:t>2026/6/22</a:t>
             </a:fld>
             <a:endParaRPr kumimoji="1" lang="ja-JP" altLang="en-US"/>
           </a:p>
@@ -500,7 +500,7 @@
           <a:p>
             <a:fld id="{E9CC885B-4903-4D54-9A93-00025F12DED9}" type="datetimeFigureOut">
               <a:rPr kumimoji="1" lang="ja-JP" altLang="en-US" smtClean="0"/>
-              <a:t>2025/3/3</a:t>
+              <a:t>2026/6/22</a:t>
             </a:fld>
             <a:endParaRPr kumimoji="1" lang="ja-JP" altLang="en-US"/>
           </a:p>
@@ -740,7 +740,7 @@
           <a:p>
             <a:fld id="{E9CC885B-4903-4D54-9A93-00025F12DED9}" type="datetimeFigureOut">
               <a:rPr kumimoji="1" lang="ja-JP" altLang="en-US" smtClean="0"/>
-              <a:t>2025/3/3</a:t>
+              <a:t>2026/6/22</a:t>
             </a:fld>
             <a:endParaRPr kumimoji="1" lang="ja-JP" altLang="en-US"/>
           </a:p>
@@ -970,7 +970,7 @@
           <a:p>
             <a:fld id="{E9CC885B-4903-4D54-9A93-00025F12DED9}" type="datetimeFigureOut">
               <a:rPr kumimoji="1" lang="ja-JP" altLang="en-US" smtClean="0"/>
-              <a:t>2025/3/3</a:t>
+              <a:t>2026/6/22</a:t>
             </a:fld>
             <a:endParaRPr kumimoji="1" lang="ja-JP" altLang="en-US"/>
           </a:p>
@@ -1245,7 +1245,7 @@
           <a:p>
             <a:fld id="{E9CC885B-4903-4D54-9A93-00025F12DED9}" type="datetimeFigureOut">
               <a:rPr kumimoji="1" lang="ja-JP" altLang="en-US" smtClean="0"/>
-              <a:t>2025/3/3</a:t>
+              <a:t>2026/6/22</a:t>
             </a:fld>
             <a:endParaRPr kumimoji="1" lang="ja-JP" altLang="en-US"/>
           </a:p>
@@ -1574,7 +1574,7 @@
           <a:p>
             <a:fld id="{E9CC885B-4903-4D54-9A93-00025F12DED9}" type="datetimeFigureOut">
               <a:rPr kumimoji="1" lang="ja-JP" altLang="en-US" smtClean="0"/>
-              <a:t>2025/3/3</a:t>
+              <a:t>2026/6/22</a:t>
             </a:fld>
             <a:endParaRPr kumimoji="1" lang="ja-JP" altLang="en-US"/>
           </a:p>
@@ -2050,7 +2050,7 @@
           <a:p>
             <a:fld id="{E9CC885B-4903-4D54-9A93-00025F12DED9}" type="datetimeFigureOut">
               <a:rPr kumimoji="1" lang="ja-JP" altLang="en-US" smtClean="0"/>
-              <a:t>2025/3/3</a:t>
+              <a:t>2026/6/22</a:t>
             </a:fld>
             <a:endParaRPr kumimoji="1" lang="ja-JP" altLang="en-US"/>
           </a:p>
@@ -2191,7 +2191,7 @@
           <a:p>
             <a:fld id="{E9CC885B-4903-4D54-9A93-00025F12DED9}" type="datetimeFigureOut">
               <a:rPr kumimoji="1" lang="ja-JP" altLang="en-US" smtClean="0"/>
-              <a:t>2025/3/3</a:t>
+              <a:t>2026/6/22</a:t>
             </a:fld>
             <a:endParaRPr kumimoji="1" lang="ja-JP" altLang="en-US"/>
           </a:p>
@@ -2304,7 +2304,7 @@
           <a:p>
             <a:fld id="{E9CC885B-4903-4D54-9A93-00025F12DED9}" type="datetimeFigureOut">
               <a:rPr kumimoji="1" lang="ja-JP" altLang="en-US" smtClean="0"/>
-              <a:t>2025/3/3</a:t>
+              <a:t>2026/6/22</a:t>
             </a:fld>
             <a:endParaRPr kumimoji="1" lang="ja-JP" altLang="en-US"/>
           </a:p>
@@ -2647,7 +2647,7 @@
           <a:p>
             <a:fld id="{E9CC885B-4903-4D54-9A93-00025F12DED9}" type="datetimeFigureOut">
               <a:rPr kumimoji="1" lang="ja-JP" altLang="en-US" smtClean="0"/>
-              <a:t>2025/3/3</a:t>
+              <a:t>2026/6/22</a:t>
             </a:fld>
             <a:endParaRPr kumimoji="1" lang="ja-JP" altLang="en-US"/>
           </a:p>
@@ -2935,7 +2935,7 @@
           <a:p>
             <a:fld id="{E9CC885B-4903-4D54-9A93-00025F12DED9}" type="datetimeFigureOut">
               <a:rPr kumimoji="1" lang="ja-JP" altLang="en-US" smtClean="0"/>
-              <a:t>2025/3/3</a:t>
+              <a:t>2026/6/22</a:t>
             </a:fld>
             <a:endParaRPr kumimoji="1" lang="ja-JP" altLang="en-US"/>
           </a:p>
@@ -3208,7 +3208,7 @@
           <a:p>
             <a:fld id="{E9CC885B-4903-4D54-9A93-00025F12DED9}" type="datetimeFigureOut">
               <a:rPr kumimoji="1" lang="ja-JP" altLang="en-US" smtClean="0"/>
-              <a:t>2025/3/3</a:t>
+              <a:t>2026/6/22</a:t>
             </a:fld>
             <a:endParaRPr kumimoji="1" lang="ja-JP" altLang="en-US"/>
           </a:p>
@@ -5471,7 +5471,7 @@
         <p:spPr>
           <a:xfrm>
             <a:off x="567542" y="1216429"/>
-            <a:ext cx="7132081" cy="461665"/>
+            <a:ext cx="6516528" cy="461665"/>
           </a:xfrm>
           <a:prstGeom prst="rect">
             <a:avLst/>
@@ -5494,7 +5494,7 @@
                   <a:srgbClr val="FF0000"/>
                 </a:solidFill>
               </a:rPr>
-              <a:t>ジャンプ力はやがて</a:t>
+              <a:t>上昇力はやがて</a:t>
             </a:r>
             <a:r>
               <a:rPr lang="en-US" altLang="ja-JP" sz="2400" b="1" dirty="0">
